--- a/docs/content/power_and_error/power_and_error_activity.pptx
+++ b/docs/content/power_and_error/power_and_error_activity.pptx
@@ -3304,7 +3304,7 @@
             </a:pPr>
             <a:r>
               <a:rPr/>
-              <a:t>Power and Type I &amp; II Error</a:t>
+              <a:t>Activity: Power and Type I &amp; II Error</a:t>
             </a:r>
           </a:p>
         </p:txBody>
@@ -3908,7 +3908,7 @@
             </a:pPr>
             <a:r>
               <a:rPr/>
-              <a:t>Worksheet 7: Power and Type I &amp; II Error</a:t>
+              <a:t>Worksheet: Power and Type I &amp; II Error</a:t>
             </a:r>
           </a:p>
         </p:txBody>
@@ -6403,7 +6403,7 @@
             </a:pPr>
             <a:r>
               <a:rPr/>
-              <a:t>Deciding between the standard t-test (equal variances) and Welch’s t-test (unequal variances) depends on a Levene’s test result — review Worksheet 6 if you need a refresher.</a:t>
+              <a:t>Deciding between the standard t-test (equal variances) and Welch’s t-test (unequal variances) depends on a Levene’s test result — review the T-Tests worksheet if you need a refresher.</a:t>
             </a:r>
           </a:p>
           <a:p>

--- a/docs/content/power_and_error/power_and_error_activity.pptx
+++ b/docs/content/power_and_error/power_and_error_activity.pptx
@@ -12557,7 +12557,7 @@
               <a:rPr>
                 <a:latin typeface="Courier"/>
               </a:rPr>
-              <a:t>"steelblue"</a:t>
+              <a:t>"darkblue"</a:t>
             </a:r>
             <a:r>
               <a:rPr/>
